--- a/examples/before/sample.pptx
+++ b/examples/before/sample.pptx
@@ -11,6 +11,24 @@
               <a:t>河蚬 As 暴露</a:t>
             </a:r>
           </a:p>
+          <a:p>
+            <a:r>
+              <a:rPr/>
+              <a:t>贝类</a:t>
+            </a:r>
+            <a:r>
+              <a:rPr/>
+              <a:t> </a:t>
+            </a:r>
+            <a:r>
+              <a:rPr/>
+              <a:t>As</a:t>
+            </a:r>
+            <a:r>
+              <a:rPr/>
+              <a:t> 暴露</a:t>
+            </a:r>
+          </a:p>
         </p:txBody>
       </p:sp>
     </p:spTree>
